--- a/dist/초4/영어/소리낱말문장/초4_영어_소리낱말문장_03_짧은문장읽고쓰기.pptx
+++ b/dist/초4/영어/소리낱말문장/초4_영어_소리낱말문장_03_짧은문장읽고쓰기.pptx
@@ -121,13 +121,13 @@
   <p:extLst>
     <p:ext uri="{521415D9-36F7-43E2-AB2F-B90AF26B5E84}">
       <p14:sectionLst xmlns:p14="http://schemas.microsoft.com/office/powerpoint/2010/main">
-        <p14:section name="도입" id="{c17716ed-c471-0670-e36f-7fe0f643a307}">
+        <p14:section name="도입" id="{149cdd71-da73-d398-3e9e-6c7ce33b2f83}">
           <p14:sldIdLst>
             <p14:sldId id="256"/>
             <p14:sldId id="257"/>
           </p14:sldIdLst>
         </p14:section>
-        <p14:section name="개념" id="{7e9a732a-4312-ddc6-05d4-70d87e0fcff7}">
+        <p14:section name="개념" id="{e6ee0780-d3e9-7fbb-c6a5-f97801ed73d3}">
           <p14:sldIdLst>
             <p14:sldId id="258"/>
             <p14:sldId id="259"/>
@@ -135,7 +135,7 @@
             <p14:sldId id="262"/>
           </p14:sldIdLst>
         </p14:section>
-        <p14:section name="연습" id="{8ca49a65-b020-76d7-46d6-a636cf92e832}">
+        <p14:section name="연습" id="{013afe0f-ef6f-62fd-d750-8bf43211a718}">
           <p14:sldIdLst>
             <p14:sldId id="261"/>
             <p14:sldId id="263"/>
@@ -143,25 +143,25 @@
             <p14:sldId id="265"/>
           </p14:sldIdLst>
         </p14:section>
-        <p14:section name="개념" id="{5e10a471-6bcb-db9c-e7c9-559fac666326}">
+        <p14:section name="개념" id="{07e6900d-5e06-ad62-84e0-b1804aa9dee7}">
           <p14:sldIdLst/>
         </p14:section>
-        <p14:section name="연습" id="{ec72cee7-d35a-8302-be5e-696464fec27c}">
+        <p14:section name="연습" id="{c61e9556-fbce-09ec-458a-2b18e7cc9943}">
           <p14:sldIdLst/>
         </p14:section>
-        <p14:section name="확인" id="{13264c61-087b-d6de-f9b9-434ee605e378}">
+        <p14:section name="확인" id="{fb3aa516-135b-1182-3c96-58bac9463623}">
           <p14:sldIdLst>
             <p14:sldId id="266"/>
             <p14:sldId id="267"/>
             <p14:sldId id="268"/>
           </p14:sldIdLst>
         </p14:section>
-        <p14:section name="정리" id="{475b6c39-077b-eeb8-50e9-656ce9e2234e}">
+        <p14:section name="정리" id="{64d1ff7a-01b8-2625-2e1c-d2b23115c849}">
           <p14:sldIdLst>
             <p14:sldId id="269"/>
           </p14:sldIdLst>
         </p14:section>
-        <p14:section name="보충" id="{80cf0562-6395-f4e7-09fc-d25c361a38e6}">
+        <p14:section name="보충" id="{56ec521f-5311-bb40-900f-035d542bf283}">
           <p14:sldIdLst>
             <p14:sldId id="270"/>
           </p14:sldIdLst>
